--- a/cahier des charges APPArmor.pptx
+++ b/cahier des charges APPArmor.pptx
@@ -21798,8 +21798,8 @@
         </p:nvSpPr>
         <p:spPr bwMode="auto">
           <a:xfrm>
-            <a:off x="2593911" y="647224"/>
-            <a:ext cx="9580805" cy="6140142"/>
+            <a:off x="2593911" y="1570553"/>
+            <a:ext cx="9580805" cy="4293483"/>
           </a:xfrm>
           <a:prstGeom prst="rect">
             <a:avLst/>
@@ -21961,65 +21961,6 @@
                 <a:effectLst/>
                 <a:cs typeface="Times New Roman" panose="02020603050405020304" pitchFamily="18" charset="0"/>
               </a:rPr>
-              <a:t>Mettre en évidence des scénarios d’attaques réelles en créant une application vulnérable.</a:t>
-            </a:r>
-          </a:p>
-          <a:p>
-            <a:pPr marL="0" marR="0" lvl="0" indent="0" algn="just" defTabSz="914400" rtl="0" eaLnBrk="0" fontAlgn="base" latinLnBrk="0" hangingPunct="0">
-              <a:lnSpc>
-                <a:spcPct val="100000"/>
-              </a:lnSpc>
-              <a:spcBef>
-                <a:spcPct val="0"/>
-              </a:spcBef>
-              <a:spcAft>
-                <a:spcPct val="0"/>
-              </a:spcAft>
-              <a:buClrTx/>
-              <a:buSzTx/>
-              <a:buFontTx/>
-              <a:buChar char="•"/>
-              <a:tabLst/>
-            </a:pPr>
-            <a:endParaRPr kumimoji="0" lang="fr-FR" altLang="fr-FR" sz="2400" b="0" i="0" u="none" strike="noStrike" cap="none" normalizeH="0" baseline="0" dirty="0">
-              <a:ln>
-                <a:noFill/>
-              </a:ln>
-              <a:solidFill>
-                <a:schemeClr val="tx1"/>
-              </a:solidFill>
-              <a:effectLst/>
-              <a:cs typeface="Times New Roman" panose="02020603050405020304" pitchFamily="18" charset="0"/>
-            </a:endParaRPr>
-          </a:p>
-          <a:p>
-            <a:pPr marL="0" marR="0" lvl="0" indent="0" algn="just" defTabSz="914400" rtl="0" eaLnBrk="0" fontAlgn="base" latinLnBrk="0" hangingPunct="0">
-              <a:lnSpc>
-                <a:spcPct val="100000"/>
-              </a:lnSpc>
-              <a:spcBef>
-                <a:spcPct val="0"/>
-              </a:spcBef>
-              <a:spcAft>
-                <a:spcPct val="0"/>
-              </a:spcAft>
-              <a:buClrTx/>
-              <a:buSzTx/>
-              <a:buFontTx/>
-              <a:buChar char="•"/>
-              <a:tabLst/>
-            </a:pPr>
-            <a:r>
-              <a:rPr kumimoji="0" lang="fr-FR" altLang="fr-FR" sz="2400" b="0" i="0" u="none" strike="noStrike" cap="none" normalizeH="0" baseline="0" dirty="0">
-                <a:ln>
-                  <a:noFill/>
-                </a:ln>
-                <a:solidFill>
-                  <a:schemeClr val="tx1"/>
-                </a:solidFill>
-                <a:effectLst/>
-                <a:cs typeface="Times New Roman" panose="02020603050405020304" pitchFamily="18" charset="0"/>
-              </a:rPr>
               <a:t>Implémenter des mécanismes de défense basés sur </a:t>
             </a:r>
             <a:r>
@@ -22046,7 +21987,7 @@
                 <a:effectLst/>
                 <a:cs typeface="Times New Roman" panose="02020603050405020304" pitchFamily="18" charset="0"/>
               </a:rPr>
-              <a:t> pour limiter l’accès aux fichiers, bloquer les actions non autorisées et isoler l’exécution de cette application. </a:t>
+              <a:t>.</a:t>
             </a:r>
           </a:p>
           <a:p>
@@ -22375,8 +22316,8 @@
         </p:nvSpPr>
         <p:spPr bwMode="auto">
           <a:xfrm>
-            <a:off x="3413760" y="1241078"/>
-            <a:ext cx="8778240" cy="5047536"/>
+            <a:off x="3413760" y="1379577"/>
+            <a:ext cx="8778240" cy="4770537"/>
           </a:xfrm>
           <a:prstGeom prst="rect">
             <a:avLst/>
@@ -22511,7 +22452,58 @@
                   <a:schemeClr val="tx1"/>
                 </a:solidFill>
               </a:rPr>
-              <a:t> (création, modification, suppression, activer et désactiver).</a:t>
+              <a:t> (création, modification, suppression).</a:t>
+            </a:r>
+          </a:p>
+          <a:p>
+            <a:pPr lvl="0" eaLnBrk="0" fontAlgn="base" hangingPunct="0">
+              <a:spcBef>
+                <a:spcPct val="0"/>
+              </a:spcBef>
+              <a:spcAft>
+                <a:spcPct val="0"/>
+              </a:spcAft>
+            </a:pPr>
+            <a:endParaRPr lang="fr-FR" altLang="fr-FR" sz="1800" dirty="0">
+              <a:solidFill>
+                <a:schemeClr val="tx1"/>
+              </a:solidFill>
+            </a:endParaRPr>
+          </a:p>
+          <a:p>
+            <a:pPr lvl="0" eaLnBrk="0" fontAlgn="base" hangingPunct="0">
+              <a:spcBef>
+                <a:spcPct val="0"/>
+              </a:spcBef>
+              <a:spcAft>
+                <a:spcPct val="0"/>
+              </a:spcAft>
+              <a:buFontTx/>
+              <a:buChar char="•"/>
+            </a:pPr>
+            <a:r>
+              <a:rPr lang="fr-FR" altLang="fr-FR" sz="1800" dirty="0">
+                <a:solidFill>
+                  <a:schemeClr val="tx1"/>
+                </a:solidFill>
+              </a:rPr>
+              <a:t>Permettre l’activation et la désactivation des profils </a:t>
+            </a:r>
+            <a:r>
+              <a:rPr lang="fr-FR" altLang="fr-FR" sz="1800" dirty="0" err="1">
+                <a:solidFill>
+                  <a:schemeClr val="tx1"/>
+                </a:solidFill>
+              </a:rPr>
+              <a:t>AppArmor</a:t>
+            </a:r>
+            <a:r>
+              <a:rPr lang="fr-FR" altLang="fr-FR" sz="1800" dirty="0">
+                <a:solidFill>
+                  <a:schemeClr val="tx1"/>
+                </a:solidFill>
+              </a:rPr>
+              <a:t> directement depuis l’interface web.</a:t>
             </a:r>
           </a:p>
           <a:p>
@@ -22548,42 +22540,7 @@
                   <a:schemeClr val="tx1"/>
                 </a:solidFill>
               </a:rPr>
-              <a:t>Restreindre l’accès aux fichiers/processus.</a:t>
-            </a:r>
-          </a:p>
-          <a:p>
-            <a:pPr lvl="0" eaLnBrk="0" fontAlgn="base" hangingPunct="0">
-              <a:spcBef>
-                <a:spcPct val="0"/>
-              </a:spcBef>
-              <a:spcAft>
-                <a:spcPct val="0"/>
-              </a:spcAft>
-            </a:pPr>
-            <a:endParaRPr lang="fr-FR" altLang="fr-FR" sz="1800" dirty="0">
-              <a:solidFill>
-                <a:schemeClr val="tx1"/>
-              </a:solidFill>
-            </a:endParaRPr>
-          </a:p>
-          <a:p>
-            <a:pPr lvl="0" eaLnBrk="0" fontAlgn="base" hangingPunct="0">
-              <a:spcBef>
-                <a:spcPct val="0"/>
-              </a:spcBef>
-              <a:spcAft>
-                <a:spcPct val="0"/>
-              </a:spcAft>
-              <a:buFontTx/>
-              <a:buChar char="•"/>
-            </a:pPr>
-            <a:r>
-              <a:rPr lang="fr-FR" altLang="fr-FR" sz="1800" dirty="0">
-                <a:solidFill>
-                  <a:schemeClr val="tx1"/>
-                </a:solidFill>
-              </a:rPr>
-              <a:t>Basculer les modes de fonctionnement des profils (</a:t>
+              <a:t>Gérer les modes de fonctionnement des profils (</a:t>
             </a:r>
             <a:r>
               <a:rPr lang="fr-FR" altLang="fr-FR" sz="1800" i="1" dirty="0" err="1">
@@ -22652,7 +22609,7 @@
                   <a:schemeClr val="tx1"/>
                 </a:solidFill>
               </a:rPr>
-              <a:t>Fournir un tableau de bord affichant l’état global des profils surveillées.</a:t>
+              <a:t>Fournir un tableau de bord affichant l’état global des profils et des applications surveillées.</a:t>
             </a:r>
           </a:p>
           <a:p>
@@ -22707,52 +22664,6 @@
               </a:rPr>
               <a:t> générés par le système.</a:t>
             </a:r>
-          </a:p>
-          <a:p>
-            <a:pPr lvl="0" eaLnBrk="0" fontAlgn="base" hangingPunct="0">
-              <a:spcBef>
-                <a:spcPct val="0"/>
-              </a:spcBef>
-              <a:spcAft>
-                <a:spcPct val="0"/>
-              </a:spcAft>
-              <a:buFontTx/>
-              <a:buChar char="•"/>
-            </a:pPr>
-            <a:endParaRPr lang="fr-FR" altLang="fr-FR" sz="1800" dirty="0">
-              <a:solidFill>
-                <a:schemeClr val="tx1"/>
-              </a:solidFill>
-            </a:endParaRPr>
-          </a:p>
-          <a:p>
-            <a:pPr lvl="0" eaLnBrk="0" fontAlgn="base" hangingPunct="0">
-              <a:spcBef>
-                <a:spcPct val="0"/>
-              </a:spcBef>
-              <a:spcAft>
-                <a:spcPct val="0"/>
-              </a:spcAft>
-              <a:buFontTx/>
-              <a:buChar char="•"/>
-            </a:pPr>
-            <a:r>
-              <a:rPr lang="fr-FR" altLang="fr-FR" sz="1800" dirty="0">
-                <a:solidFill>
-                  <a:schemeClr val="tx1"/>
-                </a:solidFill>
-              </a:rPr>
-              <a:t>Mitigation automatique (blocage d’accès, restriction de processus, isolation d’application) en cas d’activité suspecte.</a:t>
-            </a:r>
-            <a:endParaRPr kumimoji="0" lang="fr-FR" altLang="fr-FR" sz="1800" b="0" i="0" u="none" strike="noStrike" cap="none" normalizeH="0" baseline="0" dirty="0">
-              <a:ln>
-                <a:noFill/>
-              </a:ln>
-              <a:solidFill>
-                <a:schemeClr val="tx1"/>
-              </a:solidFill>
-              <a:effectLst/>
-            </a:endParaRPr>
           </a:p>
           <a:p>
             <a:pPr marL="0" marR="0" lvl="0" indent="0" algn="l" defTabSz="914400" rtl="0" eaLnBrk="0" fontAlgn="base" latinLnBrk="0" hangingPunct="0">
@@ -25699,6 +25610,26 @@
 </file>
 
 <file path=customXml/item1.xml><?xml version="1.0" encoding="utf-8"?>
+<p:properties xmlns:p="http://schemas.microsoft.com/office/2006/metadata/properties" xmlns:xsi="http://www.w3.org/2001/XMLSchema-instance" xmlns:pc="http://schemas.microsoft.com/office/infopath/2007/PartnerControls">
+  <documentManagement>
+    <_ip_UnifiedCompliancePolicyUIAction xmlns="http://schemas.microsoft.com/sharepoint/v3" xsi:nil="true"/>
+    <Image xmlns="71af3243-3dd4-4a8d-8c0d-dd76da1f02a5">
+      <Url xsi:nil="true"/>
+      <Description xsi:nil="true"/>
+    </Image>
+    <Status xmlns="71af3243-3dd4-4a8d-8c0d-dd76da1f02a5">Not started</Status>
+    <Background xmlns="71af3243-3dd4-4a8d-8c0d-dd76da1f02a5">false</Background>
+    <_ip_UnifiedCompliancePolicyProperties xmlns="http://schemas.microsoft.com/sharepoint/v3" xsi:nil="true"/>
+    <ImageTagsTaxHTField xmlns="71af3243-3dd4-4a8d-8c0d-dd76da1f02a5">
+      <Terms xmlns="http://schemas.microsoft.com/office/infopath/2007/PartnerControls"/>
+    </ImageTagsTaxHTField>
+    <TaxCatchAll xmlns="230e9df3-be65-4c73-a93b-d1236ebd677e" xsi:nil="true"/>
+    <MediaServiceKeyPoints xmlns="71af3243-3dd4-4a8d-8c0d-dd76da1f02a5" xsi:nil="true"/>
+  </documentManagement>
+</p:properties>
+</file>
+
+<file path=customXml/item2.xml><?xml version="1.0" encoding="utf-8"?>
 <ct:contentTypeSchema xmlns:ct="http://schemas.microsoft.com/office/2006/metadata/contentType" xmlns:ma="http://schemas.microsoft.com/office/2006/metadata/properties/metaAttributes" ct:_="" ma:_="" ma:contentTypeName="Document" ma:contentTypeID="0x01010079F111ED35F8CC479449609E8A0923A6" ma:contentTypeVersion="28" ma:contentTypeDescription="Create a new document." ma:contentTypeScope="" ma:versionID="60f5a4f2d2b0abadcf532d48ebf9cb71">
   <xsd:schema xmlns:xsd="http://www.w3.org/2001/XMLSchema" xmlns:xs="http://www.w3.org/2001/XMLSchema" xmlns:p="http://schemas.microsoft.com/office/2006/metadata/properties" xmlns:ns1="http://schemas.microsoft.com/sharepoint/v3" xmlns:ns2="71af3243-3dd4-4a8d-8c0d-dd76da1f02a5" xmlns:ns3="16c05727-aa75-4e4a-9b5f-8a80a1165891" xmlns:ns4="230e9df3-be65-4c73-a93b-d1236ebd677e" targetNamespace="http://schemas.microsoft.com/office/2006/metadata/properties" ma:root="true" ma:fieldsID="7dd78129e6a1811f84807ad11c651531" ns1:_="" ns2:_="" ns3:_="" ns4:_="">
     <xsd:import namespace="http://schemas.microsoft.com/sharepoint/v3"/>
@@ -26010,7 +25941,7 @@
 </ct:contentTypeSchema>
 </file>
 
-<file path=customXml/item2.xml><?xml version="1.0" encoding="utf-8"?>
+<file path=customXml/item3.xml><?xml version="1.0" encoding="utf-8"?>
 <?mso-contentType ?>
 <FormTemplates xmlns="http://schemas.microsoft.com/sharepoint/v3/contenttype/forms">
   <Display>DocumentLibraryForm</Display>
@@ -26019,27 +25950,19 @@
 </FormTemplates>
 </file>
 
-<file path=customXml/item3.xml><?xml version="1.0" encoding="utf-8"?>
-<p:properties xmlns:p="http://schemas.microsoft.com/office/2006/metadata/properties" xmlns:xsi="http://www.w3.org/2001/XMLSchema-instance" xmlns:pc="http://schemas.microsoft.com/office/infopath/2007/PartnerControls">
-  <documentManagement>
-    <_ip_UnifiedCompliancePolicyUIAction xmlns="http://schemas.microsoft.com/sharepoint/v3" xsi:nil="true"/>
-    <Image xmlns="71af3243-3dd4-4a8d-8c0d-dd76da1f02a5">
-      <Url xsi:nil="true"/>
-      <Description xsi:nil="true"/>
-    </Image>
-    <Status xmlns="71af3243-3dd4-4a8d-8c0d-dd76da1f02a5">Not started</Status>
-    <Background xmlns="71af3243-3dd4-4a8d-8c0d-dd76da1f02a5">false</Background>
-    <_ip_UnifiedCompliancePolicyProperties xmlns="http://schemas.microsoft.com/sharepoint/v3" xsi:nil="true"/>
-    <ImageTagsTaxHTField xmlns="71af3243-3dd4-4a8d-8c0d-dd76da1f02a5">
-      <Terms xmlns="http://schemas.microsoft.com/office/infopath/2007/PartnerControls"/>
-    </ImageTagsTaxHTField>
-    <TaxCatchAll xmlns="230e9df3-be65-4c73-a93b-d1236ebd677e" xsi:nil="true"/>
-    <MediaServiceKeyPoints xmlns="71af3243-3dd4-4a8d-8c0d-dd76da1f02a5" xsi:nil="true"/>
-  </documentManagement>
-</p:properties>
+<file path=customXml/itemProps1.xml><?xml version="1.0" encoding="utf-8"?>
+<ds:datastoreItem xmlns:ds="http://schemas.openxmlformats.org/officeDocument/2006/customXml" ds:itemID="{BA719FA4-954C-4FA8-82CB-206659C3B826}">
+  <ds:schemaRefs>
+    <ds:schemaRef ds:uri="http://schemas.microsoft.com/office/2006/metadata/properties"/>
+    <ds:schemaRef ds:uri="http://schemas.microsoft.com/office/infopath/2007/PartnerControls"/>
+    <ds:schemaRef ds:uri="http://schemas.microsoft.com/sharepoint/v3"/>
+    <ds:schemaRef ds:uri="71af3243-3dd4-4a8d-8c0d-dd76da1f02a5"/>
+    <ds:schemaRef ds:uri="230e9df3-be65-4c73-a93b-d1236ebd677e"/>
+  </ds:schemaRefs>
+</ds:datastoreItem>
 </file>
 
-<file path=customXml/itemProps1.xml><?xml version="1.0" encoding="utf-8"?>
+<file path=customXml/itemProps2.xml><?xml version="1.0" encoding="utf-8"?>
 <ds:datastoreItem xmlns:ds="http://schemas.openxmlformats.org/officeDocument/2006/customXml" ds:itemID="{04948363-B267-4BAC-8655-100FBEC280C1}">
   <ds:schemaRefs>
     <ds:schemaRef ds:uri="http://schemas.microsoft.com/office/2006/metadata/contentType"/>
@@ -26060,7 +25983,7 @@
 </ds:datastoreItem>
 </file>
 
-<file path=customXml/itemProps2.xml><?xml version="1.0" encoding="utf-8"?>
+<file path=customXml/itemProps3.xml><?xml version="1.0" encoding="utf-8"?>
 <ds:datastoreItem xmlns:ds="http://schemas.openxmlformats.org/officeDocument/2006/customXml" ds:itemID="{16DBB56F-4362-4386-A1A1-3DF898896616}">
   <ds:schemaRefs>
     <ds:schemaRef ds:uri="http://schemas.microsoft.com/sharepoint/v3/contenttype/forms"/>
@@ -26068,18 +25991,6 @@
 </ds:datastoreItem>
 </file>
 
-<file path=customXml/itemProps3.xml><?xml version="1.0" encoding="utf-8"?>
-<ds:datastoreItem xmlns:ds="http://schemas.openxmlformats.org/officeDocument/2006/customXml" ds:itemID="{BA719FA4-954C-4FA8-82CB-206659C3B826}">
-  <ds:schemaRefs>
-    <ds:schemaRef ds:uri="http://schemas.microsoft.com/office/2006/metadata/properties"/>
-    <ds:schemaRef ds:uri="http://schemas.microsoft.com/office/infopath/2007/PartnerControls"/>
-    <ds:schemaRef ds:uri="http://schemas.microsoft.com/sharepoint/v3"/>
-    <ds:schemaRef ds:uri="71af3243-3dd4-4a8d-8c0d-dd76da1f02a5"/>
-    <ds:schemaRef ds:uri="230e9df3-be65-4c73-a93b-d1236ebd677e"/>
-  </ds:schemaRefs>
-</ds:datastoreItem>
-</file>
-
 <file path=docMetadata/LabelInfo.xml><?xml version="1.0" encoding="utf-8"?>
 <clbl:labelList xmlns:clbl="http://schemas.microsoft.com/office/2020/mipLabelMetadata"/>
 </file>